--- a/instructor/slides/pptx/lectures/L36.pptx
+++ b/instructor/slides/pptx/lectures/L36.pptx
@@ -3949,8 +3949,8 @@
         </p:nvSpPr>
         <p:spPr>
           <a:xfrm>
-            <a:off x="640080" y="1920240"/>
-            <a:ext cx="10972800" cy="1463040"/>
+            <a:off x="640080" y="1828800"/>
+            <a:ext cx="6675120" cy="1645920"/>
           </a:xfrm>
           <a:prstGeom prst="rect">
             <a:avLst/>
@@ -3964,7 +3964,7 @@
           <a:lstStyle/>
           <a:p>
             <a:r>
-              <a:rPr sz="4400" b="1">
+              <a:rPr sz="4000" b="1">
                 <a:solidFill>
                   <a:srgbClr val="FFFFFF"/>
                 </a:solidFill>
@@ -3983,8 +3983,8 @@
         </p:nvSpPr>
         <p:spPr>
           <a:xfrm>
-            <a:off x="640080" y="3657600"/>
-            <a:ext cx="10789920" cy="1097280"/>
+            <a:off x="640080" y="3794760"/>
+            <a:ext cx="6675120" cy="1097280"/>
           </a:xfrm>
           <a:prstGeom prst="rect">
             <a:avLst/>
@@ -3998,7 +3998,7 @@
           <a:lstStyle/>
           <a:p>
             <a:r>
-              <a:rPr sz="2000" b="0">
+              <a:rPr sz="1800" b="0">
                 <a:solidFill>
                   <a:srgbClr val="B7CBDE"/>
                 </a:solidFill>
@@ -4017,8 +4017,8 @@
         </p:nvSpPr>
         <p:spPr>
           <a:xfrm>
-            <a:off x="640080" y="5029200"/>
-            <a:ext cx="10972800" cy="457200"/>
+            <a:off x="640080" y="5120640"/>
+            <a:ext cx="6766560" cy="457200"/>
           </a:xfrm>
           <a:prstGeom prst="rect">
             <a:avLst/>
@@ -4032,7 +4032,7 @@
           <a:lstStyle/>
           <a:p>
             <a:r>
-              <a:rPr sz="1600" b="0">
+              <a:rPr sz="1500" b="0">
                 <a:solidFill>
                   <a:srgbClr val="3EC6FF"/>
                 </a:solidFill>
@@ -4043,6 +4043,30 @@
           </a:p>
         </p:txBody>
       </p:sp>
+      <p:pic>
+        <p:nvPicPr>
+          <p:cNvPr id="7" name="Picture 6" descr="dw-dates.jpg"/>
+          <p:cNvPicPr>
+            <a:picLocks noChangeAspect="1"/>
+          </p:cNvPicPr>
+          <p:nvPr/>
+        </p:nvPicPr>
+        <p:blipFill>
+          <a:blip r:embed="rId2"/>
+          <a:stretch>
+            <a:fillRect/>
+          </a:stretch>
+        </p:blipFill>
+        <p:spPr>
+          <a:xfrm>
+            <a:off x="7452360" y="1325880"/>
+            <a:ext cx="4160520" cy="4160520"/>
+          </a:xfrm>
+          <a:prstGeom prst="rect">
+            <a:avLst/>
+          </a:prstGeom>
+        </p:spPr>
+      </p:pic>
     </p:spTree>
   </p:cSld>
   <p:clrMapOvr>
@@ -4146,8 +4170,8 @@
         </p:nvSpPr>
         <p:spPr>
           <a:xfrm>
-            <a:off x="640080" y="685800"/>
-            <a:ext cx="10972800" cy="1463040"/>
+            <a:off x="640080" y="658368"/>
+            <a:ext cx="7863840" cy="1645920"/>
           </a:xfrm>
           <a:prstGeom prst="rect">
             <a:avLst/>
@@ -4161,7 +4185,7 @@
           <a:lstStyle/>
           <a:p>
             <a:r>
-              <a:rPr sz="3200" b="1">
+              <a:rPr sz="3000" b="1">
                 <a:solidFill>
                   <a:srgbClr val="FFFFFF"/>
                 </a:solidFill>
@@ -4180,8 +4204,8 @@
         </p:nvSpPr>
         <p:spPr>
           <a:xfrm>
-            <a:off x="777240" y="2286000"/>
-            <a:ext cx="10607040" cy="4754880"/>
+            <a:off x="777240" y="2331720"/>
+            <a:ext cx="7498079" cy="4754880"/>
           </a:xfrm>
           <a:prstGeom prst="rect">
             <a:avLst/>
@@ -4200,7 +4224,7 @@
               </a:spcAft>
             </a:pPr>
             <a:r>
-              <a:rPr sz="2400" b="0">
+              <a:rPr sz="2200" b="0">
                 <a:solidFill>
                   <a:srgbClr val="FFFFFF"/>
                 </a:solidFill>
@@ -4211,6 +4235,30 @@
           </a:p>
         </p:txBody>
       </p:sp>
+      <p:pic>
+        <p:nvPicPr>
+          <p:cNvPr id="6" name="Picture 5" descr="dw-dates.jpg"/>
+          <p:cNvPicPr>
+            <a:picLocks noChangeAspect="1"/>
+          </p:cNvPicPr>
+          <p:nvPr/>
+        </p:nvPicPr>
+        <p:blipFill>
+          <a:blip r:embed="rId2"/>
+          <a:stretch>
+            <a:fillRect/>
+          </a:stretch>
+        </p:blipFill>
+        <p:spPr>
+          <a:xfrm>
+            <a:off x="8732520" y="2057400"/>
+            <a:ext cx="2880360" cy="2880360"/>
+          </a:xfrm>
+          <a:prstGeom prst="rect">
+            <a:avLst/>
+          </a:prstGeom>
+        </p:spPr>
+      </p:pic>
     </p:spTree>
   </p:cSld>
   <p:clrMapOvr>
@@ -4314,8 +4362,8 @@
         </p:nvSpPr>
         <p:spPr>
           <a:xfrm>
-            <a:off x="640080" y="685800"/>
-            <a:ext cx="10972800" cy="1463040"/>
+            <a:off x="640080" y="658368"/>
+            <a:ext cx="7863840" cy="1645920"/>
           </a:xfrm>
           <a:prstGeom prst="rect">
             <a:avLst/>
@@ -4329,7 +4377,7 @@
           <a:lstStyle/>
           <a:p>
             <a:r>
-              <a:rPr sz="3200" b="1">
+              <a:rPr sz="3000" b="1">
                 <a:solidFill>
                   <a:srgbClr val="FFFFFF"/>
                 </a:solidFill>
@@ -4348,8 +4396,8 @@
         </p:nvSpPr>
         <p:spPr>
           <a:xfrm>
-            <a:off x="777240" y="2286000"/>
-            <a:ext cx="10607040" cy="4754880"/>
+            <a:off x="777240" y="2331720"/>
+            <a:ext cx="7498079" cy="4754880"/>
           </a:xfrm>
           <a:prstGeom prst="rect">
             <a:avLst/>
@@ -4368,7 +4416,7 @@
               </a:spcAft>
             </a:pPr>
             <a:r>
-              <a:rPr sz="2400" b="0">
+              <a:rPr sz="2200" b="0">
                 <a:solidFill>
                   <a:srgbClr val="FFFFFF"/>
                 </a:solidFill>
@@ -4379,6 +4427,30 @@
           </a:p>
         </p:txBody>
       </p:sp>
+      <p:pic>
+        <p:nvPicPr>
+          <p:cNvPr id="6" name="Picture 5" descr="dw-dates.jpg"/>
+          <p:cNvPicPr>
+            <a:picLocks noChangeAspect="1"/>
+          </p:cNvPicPr>
+          <p:nvPr/>
+        </p:nvPicPr>
+        <p:blipFill>
+          <a:blip r:embed="rId2"/>
+          <a:stretch>
+            <a:fillRect/>
+          </a:stretch>
+        </p:blipFill>
+        <p:spPr>
+          <a:xfrm>
+            <a:off x="8732520" y="2057400"/>
+            <a:ext cx="2880360" cy="2880360"/>
+          </a:xfrm>
+          <a:prstGeom prst="rect">
+            <a:avLst/>
+          </a:prstGeom>
+        </p:spPr>
+      </p:pic>
     </p:spTree>
   </p:cSld>
   <p:clrMapOvr>
@@ -4482,8 +4554,8 @@
         </p:nvSpPr>
         <p:spPr>
           <a:xfrm>
-            <a:off x="640080" y="685800"/>
-            <a:ext cx="10972800" cy="1463040"/>
+            <a:off x="640080" y="658368"/>
+            <a:ext cx="10972800" cy="1645920"/>
           </a:xfrm>
           <a:prstGeom prst="rect">
             <a:avLst/>
@@ -4497,7 +4569,7 @@
           <a:lstStyle/>
           <a:p>
             <a:r>
-              <a:rPr sz="3200" b="1">
+              <a:rPr sz="3000" b="1">
                 <a:solidFill>
                   <a:srgbClr val="FFFFFF"/>
                 </a:solidFill>
@@ -4763,8 +4835,8 @@
         </p:nvSpPr>
         <p:spPr>
           <a:xfrm>
-            <a:off x="640080" y="685800"/>
-            <a:ext cx="10972800" cy="1463040"/>
+            <a:off x="640080" y="658368"/>
+            <a:ext cx="7863840" cy="1645920"/>
           </a:xfrm>
           <a:prstGeom prst="rect">
             <a:avLst/>
@@ -4778,7 +4850,7 @@
           <a:lstStyle/>
           <a:p>
             <a:r>
-              <a:rPr sz="3200" b="1">
+              <a:rPr sz="3000" b="1">
                 <a:solidFill>
                   <a:srgbClr val="FFFFFF"/>
                 </a:solidFill>
@@ -4797,8 +4869,8 @@
         </p:nvSpPr>
         <p:spPr>
           <a:xfrm>
-            <a:off x="777240" y="2286000"/>
-            <a:ext cx="10607040" cy="4754880"/>
+            <a:off x="777240" y="2331720"/>
+            <a:ext cx="7498079" cy="4754880"/>
           </a:xfrm>
           <a:prstGeom prst="rect">
             <a:avLst/>
@@ -4817,7 +4889,7 @@
               </a:spcAft>
             </a:pPr>
             <a:r>
-              <a:rPr sz="2400" b="0">
+              <a:rPr sz="2200" b="0">
                 <a:solidFill>
                   <a:srgbClr val="FFFFFF"/>
                 </a:solidFill>
@@ -4833,7 +4905,7 @@
               </a:spcAft>
             </a:pPr>
             <a:r>
-              <a:rPr sz="2400" b="0">
+              <a:rPr sz="2200" b="0">
                 <a:solidFill>
                   <a:srgbClr val="FFFFFF"/>
                 </a:solidFill>
@@ -4844,6 +4916,30 @@
           </a:p>
         </p:txBody>
       </p:sp>
+      <p:pic>
+        <p:nvPicPr>
+          <p:cNvPr id="6" name="Picture 5" descr="dw-dates.jpg"/>
+          <p:cNvPicPr>
+            <a:picLocks noChangeAspect="1"/>
+          </p:cNvPicPr>
+          <p:nvPr/>
+        </p:nvPicPr>
+        <p:blipFill>
+          <a:blip r:embed="rId2"/>
+          <a:stretch>
+            <a:fillRect/>
+          </a:stretch>
+        </p:blipFill>
+        <p:spPr>
+          <a:xfrm>
+            <a:off x="8732520" y="2057400"/>
+            <a:ext cx="2880360" cy="2880360"/>
+          </a:xfrm>
+          <a:prstGeom prst="rect">
+            <a:avLst/>
+          </a:prstGeom>
+        </p:spPr>
+      </p:pic>
     </p:spTree>
   </p:cSld>
   <p:clrMapOvr>
@@ -4947,8 +5043,8 @@
         </p:nvSpPr>
         <p:spPr>
           <a:xfrm>
-            <a:off x="640080" y="685800"/>
-            <a:ext cx="10972800" cy="1463040"/>
+            <a:off x="640080" y="658368"/>
+            <a:ext cx="10972800" cy="1645920"/>
           </a:xfrm>
           <a:prstGeom prst="rect">
             <a:avLst/>
@@ -4962,7 +5058,7 @@
           <a:lstStyle/>
           <a:p>
             <a:r>
-              <a:rPr sz="3200" b="1">
+              <a:rPr sz="3000" b="1">
                 <a:solidFill>
                   <a:srgbClr val="FFFFFF"/>
                 </a:solidFill>
@@ -5244,8 +5340,8 @@
         </p:nvSpPr>
         <p:spPr>
           <a:xfrm>
-            <a:off x="640080" y="685800"/>
-            <a:ext cx="10972800" cy="1463040"/>
+            <a:off x="640080" y="658368"/>
+            <a:ext cx="7863840" cy="1645920"/>
           </a:xfrm>
           <a:prstGeom prst="rect">
             <a:avLst/>
@@ -5259,7 +5355,7 @@
           <a:lstStyle/>
           <a:p>
             <a:r>
-              <a:rPr sz="3200" b="1">
+              <a:rPr sz="3000" b="1">
                 <a:solidFill>
                   <a:srgbClr val="FFFFFF"/>
                 </a:solidFill>
@@ -5278,8 +5374,8 @@
         </p:nvSpPr>
         <p:spPr>
           <a:xfrm>
-            <a:off x="777240" y="2286000"/>
-            <a:ext cx="10607040" cy="4754880"/>
+            <a:off x="777240" y="2331720"/>
+            <a:ext cx="7498079" cy="4754880"/>
           </a:xfrm>
           <a:prstGeom prst="rect">
             <a:avLst/>
@@ -5298,7 +5394,7 @@
               </a:spcAft>
             </a:pPr>
             <a:r>
-              <a:rPr sz="2400" b="0">
+              <a:rPr sz="2200" b="0">
                 <a:solidFill>
                   <a:srgbClr val="FFFFFF"/>
                 </a:solidFill>
@@ -5309,6 +5405,30 @@
           </a:p>
         </p:txBody>
       </p:sp>
+      <p:pic>
+        <p:nvPicPr>
+          <p:cNvPr id="6" name="Picture 5" descr="dw-dates.jpg"/>
+          <p:cNvPicPr>
+            <a:picLocks noChangeAspect="1"/>
+          </p:cNvPicPr>
+          <p:nvPr/>
+        </p:nvPicPr>
+        <p:blipFill>
+          <a:blip r:embed="rId2"/>
+          <a:stretch>
+            <a:fillRect/>
+          </a:stretch>
+        </p:blipFill>
+        <p:spPr>
+          <a:xfrm>
+            <a:off x="8732520" y="2057400"/>
+            <a:ext cx="2880360" cy="2880360"/>
+          </a:xfrm>
+          <a:prstGeom prst="rect">
+            <a:avLst/>
+          </a:prstGeom>
+        </p:spPr>
+      </p:pic>
     </p:spTree>
   </p:cSld>
   <p:clrMapOvr>
